--- a/dist/weeks-1학기/서비스디자인_1학기_01주차_오리엔테이션.pptx
+++ b/dist/weeks-1학기/서비스디자인_1학기_01주차_오리엔테이션.pptx
@@ -7891,7 +7891,7 @@
               <a:buNone/>
             </a:pPr>
             <a:r>
-              <a:rPr lang="en-US" sz="1150" dirty="0">
+              <a:rPr lang="en-US" sz="1050" dirty="0">
                 <a:solidFill>
                   <a:srgbClr val="6E6E6E"/>
                 </a:solidFill>
@@ -7901,7 +7901,7 @@
               </a:rPr>
               <a:t>관람자는 평균 20–30초를 씁니다. 3m에서 제목이 읽히고, 1.5m에서 구조가 파악되고, 50cm에서 디테일이 보여야 합니다. 세 개의 거리를 위한 세 개의 정보 층이 필요합니다.</a:t>
             </a:r>
-            <a:endParaRPr lang="en-US" sz="1150" dirty="0"/>
+            <a:endParaRPr lang="en-US" sz="1050" dirty="0"/>
           </a:p>
         </p:txBody>
       </p:sp>
@@ -8064,7 +8064,7 @@
               <a:buNone/>
             </a:pPr>
             <a:r>
-              <a:rPr lang="en-US" sz="1150" dirty="0">
+              <a:rPr lang="en-US" sz="1050" dirty="0">
                 <a:solidFill>
                   <a:srgbClr val="6E6E6E"/>
                 </a:solidFill>
@@ -8074,7 +8074,7 @@
               </a:rPr>
               <a:t>B0 900×1200mm 세로. CMYK 300dpi, 재단 여백 3mm 포함. 14주차에 인쇄 데이터를 제출하고 15주차 전에 출력합니다. 규격은 학과 확정 후 공지합니다.</a:t>
             </a:r>
-            <a:endParaRPr lang="en-US" sz="1150" dirty="0"/>
+            <a:endParaRPr lang="en-US" sz="1050" dirty="0"/>
           </a:p>
         </p:txBody>
       </p:sp>
@@ -8237,7 +8237,7 @@
               <a:buNone/>
             </a:pPr>
             <a:r>
-              <a:rPr lang="en-US" sz="1150" dirty="0">
+              <a:rPr lang="en-US" sz="1050" dirty="0">
                 <a:solidFill>
                   <a:srgbClr val="6E6E6E"/>
                 </a:solidFill>
@@ -8247,7 +8247,7 @@
               </a:rPr>
               <a:t>① 문제가 무엇인지 20초 안에 전달되는가 ② 리서치 근거가 보이는가 ③ 해결안이 문제와 논리적으로 연결되는가 ④ 시각적 완성도.</a:t>
             </a:r>
-            <a:endParaRPr lang="en-US" sz="1150" dirty="0"/>
+            <a:endParaRPr lang="en-US" sz="1050" dirty="0"/>
           </a:p>
         </p:txBody>
       </p:sp>
@@ -8410,7 +8410,7 @@
               <a:buNone/>
             </a:pPr>
             <a:r>
-              <a:rPr lang="en-US" sz="1150" dirty="0">
+              <a:rPr lang="en-US" sz="1050" dirty="0">
                 <a:solidFill>
                   <a:srgbClr val="B8B8B8"/>
                 </a:solidFill>
@@ -8420,7 +8420,7 @@
               </a:rPr>
               <a:t>화면 이미지를 크게 여러 장 붙이고 설명을 작게 넣는 구성. 관람자는 무슨 서비스인지 알 수 없습니다. 패널의 주인공은 화면이 아니라 문제입니다.</a:t>
             </a:r>
-            <a:endParaRPr lang="en-US" sz="1150" dirty="0"/>
+            <a:endParaRPr lang="en-US" sz="1050" dirty="0"/>
           </a:p>
         </p:txBody>
       </p:sp>
@@ -12502,7 +12502,7 @@
               <a:buNone/>
             </a:pPr>
             <a:r>
-              <a:rPr lang="en-US" sz="1150" dirty="0">
+              <a:rPr lang="en-US" sz="1050" dirty="0">
                 <a:solidFill>
                   <a:srgbClr val="6E6E6E"/>
                 </a:solidFill>
@@ -12512,7 +12512,7 @@
               </a:rPr>
               <a:t>관심 영역에서 출발해 데스크 리서치와 필드 리서치로 사용자와 맥락을 확보합니다. 인터뷰와 관찰이 이 구간의 핵심이며, 4주차에 퍼소나와 저니맵을 완성합니다.</a:t>
             </a:r>
-            <a:endParaRPr lang="en-US" sz="1150" dirty="0"/>
+            <a:endParaRPr lang="en-US" sz="1050" dirty="0"/>
           </a:p>
         </p:txBody>
       </p:sp>
@@ -12675,7 +12675,7 @@
               <a:buNone/>
             </a:pPr>
             <a:r>
-              <a:rPr lang="en-US" sz="1150" dirty="0">
+              <a:rPr lang="en-US" sz="1050" dirty="0">
                 <a:solidFill>
                   <a:srgbClr val="6E6E6E"/>
                 </a:solidFill>
@@ -12685,7 +12685,7 @@
               </a:rPr>
               <a:t>관찰을 문제 진술로 번역합니다. POV와 HMW로 문제를 재구성하고, 컨셉 3안에서 하나를 골라 서비스 블루프린트까지 구조화합니다. 8주차 중간 발표가 첫 검증점입니다.</a:t>
             </a:r>
-            <a:endParaRPr lang="en-US" sz="1150" dirty="0"/>
+            <a:endParaRPr lang="en-US" sz="1050" dirty="0"/>
           </a:p>
         </p:txBody>
       </p:sp>
@@ -12848,7 +12848,7 @@
               <a:buNone/>
             </a:pPr>
             <a:r>
-              <a:rPr lang="en-US" sz="1150" dirty="0">
+              <a:rPr lang="en-US" sz="1050" dirty="0">
                 <a:solidFill>
                   <a:srgbClr val="6E6E6E"/>
                 </a:solidFill>
@@ -12858,7 +12858,7 @@
               </a:rPr>
               <a:t>정보구조와 와이어프레임에서 시작해 디자인 시스템, 고충실도 화면, 프로토타입까지 만듭니다. 12주차 사용성 테스트로 자기 설계를 스스로 반증합니다.</a:t>
             </a:r>
-            <a:endParaRPr lang="en-US" sz="1150" dirty="0"/>
+            <a:endParaRPr lang="en-US" sz="1050" dirty="0"/>
           </a:p>
         </p:txBody>
       </p:sp>
@@ -13021,7 +13021,7 @@
               <a:buNone/>
             </a:pPr>
             <a:r>
-              <a:rPr lang="en-US" sz="1150" dirty="0">
+              <a:rPr lang="en-US" sz="1050" dirty="0">
                 <a:solidFill>
                   <a:srgbClr val="B8B8B8"/>
                 </a:solidFill>
@@ -13031,7 +13031,7 @@
               </a:rPr>
               <a:t>화면을 전시 패널이라는 다른 형식으로 재편집합니다. 14주차 인쇄 데이터 마감은 출력 일정과 직결되므로 예외가 없습니다.</a:t>
             </a:r>
-            <a:endParaRPr lang="en-US" sz="1150" dirty="0"/>
+            <a:endParaRPr lang="en-US" sz="1050" dirty="0"/>
           </a:p>
         </p:txBody>
       </p:sp>
@@ -16398,7 +16398,7 @@
               <a:buNone/>
             </a:pPr>
             <a:r>
-              <a:rPr lang="en-US" sz="1150" dirty="0">
+              <a:rPr lang="en-US" sz="1050" dirty="0">
                 <a:solidFill>
                   <a:srgbClr val="6E6E6E"/>
                 </a:solidFill>
@@ -16408,7 +16408,7 @@
               </a:rPr>
               <a:t>사용자만이 아니라 그 서비스를 굴리는 직원, 영향을 받는 주변인까지 사람으로 봅니다. 콜센터 상담원의 화면이 나쁘면 고객 경험도 나빠집니다.</a:t>
             </a:r>
-            <a:endParaRPr lang="en-US" sz="1150" dirty="0"/>
+            <a:endParaRPr lang="en-US" sz="1050" dirty="0"/>
           </a:p>
         </p:txBody>
       </p:sp>
@@ -16571,7 +16571,7 @@
               <a:buNone/>
             </a:pPr>
             <a:r>
-              <a:rPr lang="en-US" sz="1150" dirty="0">
+              <a:rPr lang="en-US" sz="1050" dirty="0">
                 <a:solidFill>
                   <a:srgbClr val="6E6E6E"/>
                 </a:solidFill>
@@ -16581,7 +16581,7 @@
               </a:rPr>
               <a:t>디자이너 혼자 답을 내지 않습니다. 이해관계자를 설계 과정에 끌어들여 함께 만듭니다. 그래야 실제로 실행됩니다.</a:t>
             </a:r>
-            <a:endParaRPr lang="en-US" sz="1150" dirty="0"/>
+            <a:endParaRPr lang="en-US" sz="1050" dirty="0"/>
           </a:p>
         </p:txBody>
       </p:sp>
@@ -16744,7 +16744,7 @@
               <a:buNone/>
             </a:pPr>
             <a:r>
-              <a:rPr lang="en-US" sz="1150" dirty="0">
+              <a:rPr lang="en-US" sz="1050" dirty="0">
                 <a:solidFill>
                   <a:srgbClr val="6E6E6E"/>
                 </a:solidFill>
@@ -16754,7 +16754,7 @@
               </a:rPr>
               <a:t>경험은 한 장면이 아니라 시간 위에 놓인 연속입니다. 전 · 중 · 후로 나눠 보면 진짜 문제는 대개 '전'이나 '후'에 있습니다.</a:t>
             </a:r>
-            <a:endParaRPr lang="en-US" sz="1150" dirty="0"/>
+            <a:endParaRPr lang="en-US" sz="1050" dirty="0"/>
           </a:p>
         </p:txBody>
       </p:sp>
@@ -16917,7 +16917,7 @@
               <a:buNone/>
             </a:pPr>
             <a:r>
-              <a:rPr lang="en-US" sz="1150" dirty="0">
+              <a:rPr lang="en-US" sz="1050" dirty="0">
                 <a:solidFill>
                   <a:srgbClr val="6E6E6E"/>
                 </a:solidFill>
@@ -16927,7 +16927,7 @@
               </a:rPr>
               <a:t>터치포인트 하나만 고치면 문제는 옆으로 옮겨갑니다. 앱을 고쳤는데 전화 문의가 늘었다면 해결한 게 아닙니다.</a:t>
             </a:r>
-            <a:endParaRPr lang="en-US" sz="1150" dirty="0"/>
+            <a:endParaRPr lang="en-US" sz="1050" dirty="0"/>
           </a:p>
         </p:txBody>
       </p:sp>
@@ -17484,7 +17484,7 @@
               <a:buNone/>
             </a:pPr>
             <a:r>
-              <a:rPr lang="en-US" sz="1150" dirty="0">
+              <a:rPr lang="en-US" sz="1050" dirty="0">
                 <a:solidFill>
                   <a:srgbClr val="6E6E6E"/>
                 </a:solidFill>
@@ -17494,7 +17494,7 @@
               </a:rPr>
               <a:t>고객이 실제로 만나는 접점. 앱 화면, 안내문, 직원의 말, 문자 알림, 물리적 공간.</a:t>
             </a:r>
-            <a:endParaRPr lang="en-US" sz="1150" dirty="0"/>
+            <a:endParaRPr lang="en-US" sz="1050" dirty="0"/>
           </a:p>
         </p:txBody>
       </p:sp>
@@ -17657,7 +17657,7 @@
               <a:buNone/>
             </a:pPr>
             <a:r>
-              <a:rPr lang="en-US" sz="1150" dirty="0">
+              <a:rPr lang="en-US" sz="1050" dirty="0">
                 <a:solidFill>
                   <a:srgbClr val="6E6E6E"/>
                 </a:solidFill>
@@ -17667,7 +17667,7 @@
               </a:rPr>
               <a:t>고객이 볼 수 있는 것과 없는 것을 가르는 선. 서비스 블루프린트의 핵심 개념입니다.</a:t>
             </a:r>
-            <a:endParaRPr lang="en-US" sz="1150" dirty="0"/>
+            <a:endParaRPr lang="en-US" sz="1050" dirty="0"/>
           </a:p>
         </p:txBody>
       </p:sp>
@@ -17830,7 +17830,7 @@
               <a:buNone/>
             </a:pPr>
             <a:r>
-              <a:rPr lang="en-US" sz="1150" dirty="0">
+              <a:rPr lang="en-US" sz="1050" dirty="0">
                 <a:solidFill>
                   <a:srgbClr val="6E6E6E"/>
                 </a:solidFill>
@@ -17840,7 +17840,7 @@
               </a:rPr>
               <a:t>고객은 못 보지만 경험을 결정하는 것. 직원 업무, 승인 절차, 내부 시스템.</a:t>
             </a:r>
-            <a:endParaRPr lang="en-US" sz="1150" dirty="0"/>
+            <a:endParaRPr lang="en-US" sz="1050" dirty="0"/>
           </a:p>
         </p:txBody>
       </p:sp>
@@ -18003,7 +18003,7 @@
               <a:buNone/>
             </a:pPr>
             <a:r>
-              <a:rPr lang="en-US" sz="1150" dirty="0">
+              <a:rPr lang="en-US" sz="1050" dirty="0">
                 <a:solidFill>
                   <a:srgbClr val="B8B8B8"/>
                 </a:solidFill>
@@ -18013,7 +18013,7 @@
               </a:rPr>
               <a:t>더 뒤에 있는 정책, 계약, 데이터 구조, 법 제도. 가장 바꾸기 어려운 층입니다.</a:t>
             </a:r>
-            <a:endParaRPr lang="en-US" sz="1150" dirty="0"/>
+            <a:endParaRPr lang="en-US" sz="1050" dirty="0"/>
           </a:p>
         </p:txBody>
       </p:sp>
